--- a/classes/parte-8-blue-team-deteccion-y-soc/187-deteccion-basada-en-mitre-att-ck/clase-187-presentacion.pptx
+++ b/classes/parte-8-blue-team-deteccion-y-soc/187-deteccion-basada-en-mitre-att-ck/clase-187-presentacion.pptx
@@ -17,6 +17,11 @@
     <p:sldId id="265" r:id="rId16"/>
     <p:sldId id="266" r:id="rId17"/>
     <p:sldId id="267" r:id="rId18"/>
+    <p:sldId id="268" r:id="rId19"/>
+    <p:sldId id="269" r:id="rId20"/>
+    <p:sldId id="270" r:id="rId21"/>
+    <p:sldId id="271" r:id="rId22"/>
+    <p:sldId id="272" r:id="rId23"/>
   </p:sldIdLst>
   <p:sldSz cx="9144000" cy="6858000" type="screen4x3"/>
   <p:notesSz cx="6858000" cy="9144000"/>
@@ -3198,7 +3203,7 @@
                   <a:srgbClr val="0B3D2E"/>
                 </a:solidFill>
               </a:rPr>
-              <a:t>⚠️ Errores comunes</a:t>
+              <a:t>🧰 Herramientas y preparación</a:t>
             </a:r>
           </a:p>
         </p:txBody>
@@ -3236,67 +3241,67 @@
                   <a:srgbClr val="22282E"/>
                 </a:solidFill>
               </a:rPr>
-              <a:t>•  "Cubrimos el 90% de ATT&amp;CK" — Confundes tocar la técnica con detectarla bien; mide profundidad, no solo presencia</a:t>
-            </a:r>
-          </a:p>
-          <a:p>
-            <a:pPr>
-              <a:spcAft>
-                <a:spcPts val="600"/>
-              </a:spcAft>
-            </a:pPr>
-            <a:r>
-              <a:rPr sz="1500">
-                <a:solidFill>
-                  <a:srgbClr val="22282E"/>
-                </a:solidFill>
-              </a:rPr>
-              <a:t>•  Detecciones solo por IOC — Estás en la base de la pirámide; migra a comportamiento</a:t>
-            </a:r>
-          </a:p>
-          <a:p>
-            <a:pPr>
-              <a:spcAft>
-                <a:spcPts val="600"/>
-              </a:spcAft>
-            </a:pPr>
-            <a:r>
-              <a:rPr sz="1500">
-                <a:solidFill>
-                  <a:srgbClr val="22282E"/>
-                </a:solidFill>
-              </a:rPr>
-              <a:t>•  Técnica marcada verde sin telemetría — No hay data source que la respalde; revisa fuentes reales</a:t>
-            </a:r>
-          </a:p>
-          <a:p>
-            <a:pPr>
-              <a:spcAft>
-                <a:spcPts val="600"/>
-              </a:spcAft>
-            </a:pPr>
-            <a:r>
-              <a:rPr sz="1500">
-                <a:solidFill>
-                  <a:srgbClr val="22282E"/>
-                </a:solidFill>
-              </a:rPr>
-              <a:t>•  Navigator saturado de colores — Falta priorización; filtra por intel relevante</a:t>
-            </a:r>
-          </a:p>
-          <a:p>
-            <a:pPr>
-              <a:spcAft>
-                <a:spcPts val="600"/>
-              </a:spcAft>
-            </a:pPr>
-            <a:r>
-              <a:rPr sz="1500">
-                <a:solidFill>
-                  <a:srgbClr val="22282E"/>
-                </a:solidFill>
-              </a:rPr>
-              <a:t>•  Subtécnicas ignoradas — Mapeas solo a la técnica padre; baja al nivel de subtécnica</a:t>
+              <a:t>•  ATT&amp;CK Navigator (versión web oficial o desplegada localmente).</a:t>
+            </a:r>
+          </a:p>
+          <a:p>
+            <a:pPr>
+              <a:spcAft>
+                <a:spcPts val="600"/>
+              </a:spcAft>
+            </a:pPr>
+            <a:r>
+              <a:rPr sz="1500">
+                <a:solidFill>
+                  <a:srgbClr val="22282E"/>
+                </a:solidFill>
+              </a:rPr>
+              <a:t>•  El STIX/JSON de ATT&amp;CK para automatizar mapeos si lo deseas.</a:t>
+            </a:r>
+          </a:p>
+          <a:p>
+            <a:pPr>
+              <a:spcAft>
+                <a:spcPts val="600"/>
+              </a:spcAft>
+            </a:pPr>
+            <a:r>
+              <a:rPr sz="1500">
+                <a:solidFill>
+                  <a:srgbClr val="22282E"/>
+                </a:solidFill>
+              </a:rPr>
+              <a:t>•  Tus reglas Sigma de la clase 186 (ya traen tags attack.tXXXX).</a:t>
+            </a:r>
+          </a:p>
+          <a:p>
+            <a:pPr>
+              <a:spcAft>
+                <a:spcPts val="600"/>
+              </a:spcAft>
+            </a:pPr>
+            <a:r>
+              <a:rPr sz="1500">
+                <a:solidFill>
+                  <a:srgbClr val="22282E"/>
+                </a:solidFill>
+              </a:rPr>
+              <a:t>•  DeTT&amp;CT o Atomic Red Team para razonar sobre cobertura y validación (Atomic se usará en profundidad en la clase 200).</a:t>
+            </a:r>
+          </a:p>
+          <a:p>
+            <a:pPr>
+              <a:spcAft>
+                <a:spcPts val="600"/>
+              </a:spcAft>
+            </a:pPr>
+            <a:r>
+              <a:rPr sz="1500">
+                <a:solidFill>
+                  <a:srgbClr val="22282E"/>
+                </a:solidFill>
+              </a:rPr>
+              <a:t>•  Cualquier ejecución de técnicas para validar se hace en el laboratorio propio.</a:t>
             </a:r>
           </a:p>
         </p:txBody>
@@ -3347,7 +3352,7 @@
                   <a:srgbClr val="0B3D2E"/>
                 </a:solidFill>
               </a:rPr>
-              <a:t>❓ Preguntas frecuentes</a:t>
+              <a:t>🧪 Laboratorio guiado — Mapa de cobertura de detección</a:t>
             </a:r>
           </a:p>
         </p:txBody>
@@ -3385,82 +3390,97 @@
                   <a:srgbClr val="22282E"/>
                 </a:solidFill>
               </a:rPr>
-              <a:t>•  ❓ ¿Debo intentar cubrir toda la matriz?</a:t>
-            </a:r>
-          </a:p>
-          <a:p>
-            <a:pPr>
-              <a:spcAft>
-                <a:spcPts val="600"/>
-              </a:spcAft>
-            </a:pPr>
-            <a:r>
-              <a:rPr sz="1500">
-                <a:solidFill>
-                  <a:srgbClr val="22282E"/>
-                </a:solidFill>
-              </a:rPr>
-              <a:t>•  No. Prioriza por amenazas reales de tu sector y por profundidad. Cien técnicas mal cubiertas valen menos que veinte detectadas con solidez.</a:t>
-            </a:r>
-          </a:p>
-          <a:p>
-            <a:pPr>
-              <a:spcAft>
-                <a:spcPts val="600"/>
-              </a:spcAft>
-            </a:pPr>
-            <a:r>
-              <a:rPr sz="1500">
-                <a:solidFill>
-                  <a:srgbClr val="22282E"/>
-                </a:solidFill>
-              </a:rPr>
-              <a:t>•  ❓ ¿ATT&amp;CK sustituye a la Cyber Kill Chain?</a:t>
-            </a:r>
-          </a:p>
-          <a:p>
-            <a:pPr>
-              <a:spcAft>
-                <a:spcPts val="600"/>
-              </a:spcAft>
-            </a:pPr>
-            <a:r>
-              <a:rPr sz="1500">
-                <a:solidFill>
-                  <a:srgbClr val="22282E"/>
-                </a:solidFill>
-              </a:rPr>
-              <a:t>•  No compiten. La Kill Chain describe fases de alto nivel; ATT&amp;CK detalla el "cómo" con técnicas concretas. Muchos equipos usan ambas.</a:t>
-            </a:r>
-          </a:p>
-          <a:p>
-            <a:pPr>
-              <a:spcAft>
-                <a:spcPts val="600"/>
-              </a:spcAft>
-            </a:pPr>
-            <a:r>
-              <a:rPr sz="1500">
-                <a:solidFill>
-                  <a:srgbClr val="22282E"/>
-                </a:solidFill>
-              </a:rPr>
-              <a:t>•  ❓ ¿Cobertura de Navigator = seguridad?</a:t>
-            </a:r>
-          </a:p>
-          <a:p>
-            <a:pPr>
-              <a:spcAft>
-                <a:spcPts val="600"/>
-              </a:spcAft>
-            </a:pPr>
-            <a:r>
-              <a:rPr sz="1500">
-                <a:solidFill>
-                  <a:srgbClr val="22282E"/>
-                </a:solidFill>
-              </a:rPr>
-              <a:t>•  Es un mapa, no una garantía. Una técnica en verde puede tener una regla frágil o llena de falsos positivos. Valídala (clase 200, purple team).</a:t>
+              <a:t>•  Inventaria tus detecciones. Lista tus reglas Sigma/SIEM y anota el attack.tXXXX de cada una.</a:t>
+            </a:r>
+          </a:p>
+          <a:p>
+            <a:pPr>
+              <a:spcAft>
+                <a:spcPts val="600"/>
+              </a:spcAft>
+            </a:pPr>
+            <a:r>
+              <a:rPr sz="1500">
+                <a:solidFill>
+                  <a:srgbClr val="22282E"/>
+                </a:solidFill>
+              </a:rPr>
+              <a:t>•  Carga Navigator. Abre ATT&amp;CK Navigator y crea una capa nueva.</a:t>
+            </a:r>
+          </a:p>
+          <a:p>
+            <a:pPr>
+              <a:spcAft>
+                <a:spcPts val="600"/>
+              </a:spcAft>
+            </a:pPr>
+            <a:r>
+              <a:rPr sz="1500">
+                <a:solidFill>
+                  <a:srgbClr val="22282E"/>
+                </a:solidFill>
+              </a:rPr>
+              <a:t>•  Colorea cobertura. Marca en verde las técnicas que tus reglas cubren; en rojo las críticas sin cobertura.</a:t>
+            </a:r>
+          </a:p>
+          <a:p>
+            <a:pPr>
+              <a:spcAft>
+                <a:spcPts val="600"/>
+              </a:spcAft>
+            </a:pPr>
+            <a:r>
+              <a:rPr sz="1500">
+                <a:solidFill>
+                  <a:srgbClr val="22282E"/>
+                </a:solidFill>
+              </a:rPr>
+              <a:t>•  Cruza con tus fuentes. Para 5 técnicas rojas, revisa su data source en ATT&amp;CK y verifica si ya recolectas esa telemetría (clase 182).</a:t>
+            </a:r>
+          </a:p>
+          <a:p>
+            <a:pPr>
+              <a:spcAft>
+                <a:spcPts val="600"/>
+              </a:spcAft>
+            </a:pPr>
+            <a:r>
+              <a:rPr sz="1500">
+                <a:solidFill>
+                  <a:srgbClr val="22282E"/>
+                </a:solidFill>
+              </a:rPr>
+              <a:t>•  Aplica la pirámide del dolor. Clasifica 10 de tus detecciones: ¿detectas por hash/IP (base) o por comportamiento/TTP (cima)? Prioriza subir de nivel.</a:t>
+            </a:r>
+          </a:p>
+          <a:p>
+            <a:pPr>
+              <a:spcAft>
+                <a:spcPts val="600"/>
+              </a:spcAft>
+            </a:pPr>
+            <a:r>
+              <a:rPr sz="1500">
+                <a:solidFill>
+                  <a:srgbClr val="22282E"/>
+                </a:solidFill>
+              </a:rPr>
+              <a:t>•  Prioriza con intel. Elige un grupo relevante para tu sector (p. ej. de la página de Groups de ATT&amp;CK) y superpón sus técnicas: cubre primero las que ese grupo usa.</a:t>
+            </a:r>
+          </a:p>
+          <a:p>
+            <a:pPr>
+              <a:spcAft>
+                <a:spcPts val="600"/>
+              </a:spcAft>
+            </a:pPr>
+            <a:r>
+              <a:rPr sz="1500">
+                <a:solidFill>
+                  <a:srgbClr val="22282E"/>
+                </a:solidFill>
+              </a:rPr>
+              <a:t>•  Documenta huecos. Genera un plan: 5 técnicas sin cobertura, la telemetría que faltaría y la detección propuesta.</a:t>
             </a:r>
           </a:p>
         </p:txBody>
@@ -3511,7 +3531,7 @@
                   <a:srgbClr val="0B3D2E"/>
                 </a:solidFill>
               </a:rPr>
-              <a:t>🔗 Referencias</a:t>
+              <a:t>✍️ Ejercicios</a:t>
             </a:r>
           </a:p>
         </p:txBody>
@@ -3549,71 +3569,742 @@
                   <a:srgbClr val="22282E"/>
                 </a:solidFill>
               </a:rPr>
-              <a:t>•  MITRE ATT&amp;CK — &lt;https://attack.mitre.org/&gt;</a:t>
-            </a:r>
-          </a:p>
-          <a:p>
-            <a:pPr>
-              <a:spcAft>
-                <a:spcPts val="600"/>
-              </a:spcAft>
-            </a:pPr>
-            <a:r>
-              <a:rPr sz="1500">
-                <a:solidFill>
-                  <a:srgbClr val="22282E"/>
-                </a:solidFill>
-              </a:rPr>
-              <a:t>•  ATT&amp;CK Navigator — &lt;https://mitre-attack.github.io/attack-navigator/&gt;</a:t>
-            </a:r>
-          </a:p>
-          <a:p>
-            <a:pPr>
-              <a:spcAft>
-                <a:spcPts val="600"/>
-              </a:spcAft>
-            </a:pPr>
-            <a:r>
-              <a:rPr sz="1500">
-                <a:solidFill>
-                  <a:srgbClr val="22282E"/>
-                </a:solidFill>
-              </a:rPr>
-              <a:t>•  Bianco, D. "The Pyramid of Pain" — &lt;http://detect-respond.blogspot.com/2013/03/the-pyramid-of-pain.html&gt;</a:t>
-            </a:r>
-          </a:p>
-          <a:p>
-            <a:pPr>
-              <a:spcAft>
-                <a:spcPts val="600"/>
-              </a:spcAft>
-            </a:pPr>
-            <a:r>
-              <a:rPr sz="1500">
-                <a:solidFill>
-                  <a:srgbClr val="22282E"/>
-                </a:solidFill>
-              </a:rPr>
-              <a:t>•  ATT&amp;CK Data Sources — &lt;https://attack.mitre.org/datasources/&gt;</a:t>
-            </a:r>
-          </a:p>
-          <a:p>
-            <a:pPr>
-              <a:spcAft>
-                <a:spcPts val="600"/>
-              </a:spcAft>
-            </a:pPr>
-            <a:r>
-              <a:rPr sz="1500">
-                <a:solidFill>
-                  <a:srgbClr val="22282E"/>
-                </a:solidFill>
-              </a:rPr>
-              <a:t>•  DeTT&amp;CT — &lt;https://github.com/rabobank-cdc/DeTTECT&gt;</a:t>
-            </a:r>
-          </a:p>
-        </p:txBody>
-      </p:sp>
+              <a:t>•  Clasifica 6 indicadores en su nivel de la pirámide del dolor.</a:t>
+            </a:r>
+          </a:p>
+          <a:p>
+            <a:pPr>
+              <a:spcAft>
+                <a:spcPts val="600"/>
+              </a:spcAft>
+            </a:pPr>
+            <a:r>
+              <a:rPr sz="1500">
+                <a:solidFill>
+                  <a:srgbClr val="22282E"/>
+                </a:solidFill>
+              </a:rPr>
+              <a:t>•  Elige una técnica (p. ej. T1053 Scheduled Task) y lista su data source y una detección.</a:t>
+            </a:r>
+          </a:p>
+          <a:p>
+            <a:pPr>
+              <a:spcAft>
+                <a:spcPts val="600"/>
+              </a:spcAft>
+            </a:pPr>
+            <a:r>
+              <a:rPr sz="1500">
+                <a:solidFill>
+                  <a:srgbClr val="22282E"/>
+                </a:solidFill>
+              </a:rPr>
+              <a:t>•  Crea una capa de Navigator con la cobertura real de tu laboratorio.</a:t>
+            </a:r>
+          </a:p>
+          <a:p>
+            <a:pPr>
+              <a:spcAft>
+                <a:spcPts val="600"/>
+              </a:spcAft>
+            </a:pPr>
+            <a:r>
+              <a:rPr sz="1500">
+                <a:solidFill>
+                  <a:srgbClr val="22282E"/>
+                </a:solidFill>
+              </a:rPr>
+              <a:t>•  Explica por qué detectar por hash es frágil con un ejemplo concreto.</a:t>
+            </a:r>
+          </a:p>
+          <a:p>
+            <a:pPr>
+              <a:spcAft>
+                <a:spcPts val="600"/>
+              </a:spcAft>
+            </a:pPr>
+            <a:r>
+              <a:rPr sz="1500">
+                <a:solidFill>
+                  <a:srgbClr val="22282E"/>
+                </a:solidFill>
+              </a:rPr>
+              <a:t>•  Mapea un ataque de la Parte 7 (red team) a una cadena de técnicas ATT&amp;CK.</a:t>
+            </a:r>
+          </a:p>
+          <a:p>
+            <a:pPr>
+              <a:spcAft>
+                <a:spcPts val="600"/>
+              </a:spcAft>
+            </a:pPr>
+            <a:r>
+              <a:rPr sz="1500">
+                <a:solidFill>
+                  <a:srgbClr val="22282E"/>
+                </a:solidFill>
+              </a:rPr>
+              <a:t>•  Propón cómo pasarías una detección de nivel IP a nivel TTP.</a:t>
+            </a:r>
+          </a:p>
+        </p:txBody>
+      </p:sp>
+    </p:spTree>
+  </p:cSld>
+  <p:clrMapOvr>
+    <a:masterClrMapping/>
+  </p:clrMapOvr>
+</p:sld>
+</file>
+
+<file path=ppt/slides/slide13.xml><?xml version="1.0" encoding="utf-8"?>
+<p:sld xmlns:a="http://schemas.openxmlformats.org/drawingml/2006/main" xmlns:p="http://schemas.openxmlformats.org/presentationml/2006/main" xmlns:r="http://schemas.openxmlformats.org/officeDocument/2006/relationships">
+  <p:cSld>
+    <p:spTree>
+      <p:nvGrpSpPr>
+        <p:cNvPr id="1" name=""/>
+        <p:cNvGrpSpPr/>
+        <p:nvPr/>
+      </p:nvGrpSpPr>
+      <p:grpSpPr/>
+      <p:sp>
+        <p:nvSpPr>
+          <p:cNvPr id="2" name="TextBox 1"/>
+          <p:cNvSpPr txBox="1"/>
+          <p:nvPr/>
+        </p:nvSpPr>
+        <p:spPr>
+          <a:xfrm>
+            <a:off x="457200" y="320040"/>
+            <a:ext cx="8229600" cy="822960"/>
+          </a:xfrm>
+          <a:prstGeom prst="rect">
+            <a:avLst/>
+          </a:prstGeom>
+          <a:noFill/>
+        </p:spPr>
+        <p:txBody>
+          <a:bodyPr wrap="square">
+            <a:spAutoFit/>
+          </a:bodyPr>
+          <a:lstStyle/>
+          <a:p>
+            <a:r>
+              <a:rPr sz="2600" b="1">
+                <a:solidFill>
+                  <a:srgbClr val="0B3D2E"/>
+                </a:solidFill>
+              </a:rPr>
+              <a:t>📝 Reto verificable</a:t>
+            </a:r>
+          </a:p>
+        </p:txBody>
+      </p:sp>
+      <p:sp>
+        <p:nvSpPr>
+          <p:cNvPr id="3" name="TextBox 2"/>
+          <p:cNvSpPr txBox="1"/>
+          <p:nvPr/>
+        </p:nvSpPr>
+        <p:spPr>
+          <a:xfrm>
+            <a:off x="457200" y="1280160"/>
+            <a:ext cx="8229600" cy="4937760"/>
+          </a:xfrm>
+          <a:prstGeom prst="rect">
+            <a:avLst/>
+          </a:prstGeom>
+          <a:noFill/>
+        </p:spPr>
+        <p:txBody>
+          <a:bodyPr wrap="square">
+            <a:spAutoFit/>
+          </a:bodyPr>
+          <a:lstStyle/>
+          <a:p>
+            <a:pPr>
+              <a:spcAft>
+                <a:spcPts val="600"/>
+              </a:spcAft>
+            </a:pPr>
+            <a:r>
+              <a:rPr sz="1500">
+                <a:solidFill>
+                  <a:srgbClr val="22282E"/>
+                </a:solidFill>
+              </a:rPr>
+              <a:t>•  Entrega una capa de ATT&amp;CK Navigator que refleje la cobertura de detección de tu laboratorio y un plan priorizado de 5 huecos a cerrar, cada uno con su data source y detección propuesta. Criterio de…</a:t>
+            </a:r>
+          </a:p>
+        </p:txBody>
+      </p:sp>
+    </p:spTree>
+  </p:cSld>
+  <p:clrMapOvr>
+    <a:masterClrMapping/>
+  </p:clrMapOvr>
+</p:sld>
+</file>
+
+<file path=ppt/slides/slide14.xml><?xml version="1.0" encoding="utf-8"?>
+<p:sld xmlns:a="http://schemas.openxmlformats.org/drawingml/2006/main" xmlns:p="http://schemas.openxmlformats.org/presentationml/2006/main" xmlns:r="http://schemas.openxmlformats.org/officeDocument/2006/relationships">
+  <p:cSld>
+    <p:spTree>
+      <p:nvGrpSpPr>
+        <p:cNvPr id="1" name=""/>
+        <p:cNvGrpSpPr/>
+        <p:nvPr/>
+      </p:nvGrpSpPr>
+      <p:grpSpPr/>
+      <p:sp>
+        <p:nvSpPr>
+          <p:cNvPr id="2" name="TextBox 1"/>
+          <p:cNvSpPr txBox="1"/>
+          <p:nvPr/>
+        </p:nvSpPr>
+        <p:spPr>
+          <a:xfrm>
+            <a:off x="457200" y="320040"/>
+            <a:ext cx="8229600" cy="822960"/>
+          </a:xfrm>
+          <a:prstGeom prst="rect">
+            <a:avLst/>
+          </a:prstGeom>
+          <a:noFill/>
+        </p:spPr>
+        <p:txBody>
+          <a:bodyPr wrap="square">
+            <a:spAutoFit/>
+          </a:bodyPr>
+          <a:lstStyle/>
+          <a:p>
+            <a:r>
+              <a:rPr sz="2600" b="1">
+                <a:solidFill>
+                  <a:srgbClr val="0B3D2E"/>
+                </a:solidFill>
+              </a:rPr>
+              <a:t>⚠️ Errores comunes</a:t>
+            </a:r>
+          </a:p>
+        </p:txBody>
+      </p:sp>
+      <p:sp>
+        <p:nvSpPr>
+          <p:cNvPr id="3" name="TextBox 2"/>
+          <p:cNvSpPr txBox="1"/>
+          <p:nvPr/>
+        </p:nvSpPr>
+        <p:spPr>
+          <a:xfrm>
+            <a:off x="457200" y="1280160"/>
+            <a:ext cx="8229600" cy="4937760"/>
+          </a:xfrm>
+          <a:prstGeom prst="rect">
+            <a:avLst/>
+          </a:prstGeom>
+          <a:noFill/>
+        </p:spPr>
+        <p:txBody>
+          <a:bodyPr wrap="square">
+            <a:spAutoFit/>
+          </a:bodyPr>
+          <a:lstStyle/>
+          <a:p>
+            <a:pPr>
+              <a:spcAft>
+                <a:spcPts val="600"/>
+              </a:spcAft>
+            </a:pPr>
+            <a:r>
+              <a:rPr sz="1500">
+                <a:solidFill>
+                  <a:srgbClr val="22282E"/>
+                </a:solidFill>
+              </a:rPr>
+              <a:t>•  "Cubrimos el 90% de ATT&amp;CK" — Confundes tocar la técnica con detectarla bien; mide profundidad, no solo presencia</a:t>
+            </a:r>
+          </a:p>
+          <a:p>
+            <a:pPr>
+              <a:spcAft>
+                <a:spcPts val="600"/>
+              </a:spcAft>
+            </a:pPr>
+            <a:r>
+              <a:rPr sz="1500">
+                <a:solidFill>
+                  <a:srgbClr val="22282E"/>
+                </a:solidFill>
+              </a:rPr>
+              <a:t>•  Detecciones solo por IOC — Estás en la base de la pirámide; migra a comportamiento</a:t>
+            </a:r>
+          </a:p>
+          <a:p>
+            <a:pPr>
+              <a:spcAft>
+                <a:spcPts val="600"/>
+              </a:spcAft>
+            </a:pPr>
+            <a:r>
+              <a:rPr sz="1500">
+                <a:solidFill>
+                  <a:srgbClr val="22282E"/>
+                </a:solidFill>
+              </a:rPr>
+              <a:t>•  Técnica marcada verde sin telemetría — No hay data source que la respalde; revisa fuentes reales</a:t>
+            </a:r>
+          </a:p>
+          <a:p>
+            <a:pPr>
+              <a:spcAft>
+                <a:spcPts val="600"/>
+              </a:spcAft>
+            </a:pPr>
+            <a:r>
+              <a:rPr sz="1500">
+                <a:solidFill>
+                  <a:srgbClr val="22282E"/>
+                </a:solidFill>
+              </a:rPr>
+              <a:t>•  Navigator saturado de colores — Falta priorización; filtra por intel relevante</a:t>
+            </a:r>
+          </a:p>
+          <a:p>
+            <a:pPr>
+              <a:spcAft>
+                <a:spcPts val="600"/>
+              </a:spcAft>
+            </a:pPr>
+            <a:r>
+              <a:rPr sz="1500">
+                <a:solidFill>
+                  <a:srgbClr val="22282E"/>
+                </a:solidFill>
+              </a:rPr>
+              <a:t>•  Subtécnicas ignoradas — Mapeas solo a la técnica padre; baja al nivel de subtécnica</a:t>
+            </a:r>
+          </a:p>
+        </p:txBody>
+      </p:sp>
+    </p:spTree>
+  </p:cSld>
+  <p:clrMapOvr>
+    <a:masterClrMapping/>
+  </p:clrMapOvr>
+</p:sld>
+</file>
+
+<file path=ppt/slides/slide15.xml><?xml version="1.0" encoding="utf-8"?>
+<p:sld xmlns:a="http://schemas.openxmlformats.org/drawingml/2006/main" xmlns:p="http://schemas.openxmlformats.org/presentationml/2006/main" xmlns:r="http://schemas.openxmlformats.org/officeDocument/2006/relationships">
+  <p:cSld>
+    <p:spTree>
+      <p:nvGrpSpPr>
+        <p:cNvPr id="1" name=""/>
+        <p:cNvGrpSpPr/>
+        <p:nvPr/>
+      </p:nvGrpSpPr>
+      <p:grpSpPr/>
+      <p:sp>
+        <p:nvSpPr>
+          <p:cNvPr id="2" name="TextBox 1"/>
+          <p:cNvSpPr txBox="1"/>
+          <p:nvPr/>
+        </p:nvSpPr>
+        <p:spPr>
+          <a:xfrm>
+            <a:off x="457200" y="320040"/>
+            <a:ext cx="8229600" cy="822960"/>
+          </a:xfrm>
+          <a:prstGeom prst="rect">
+            <a:avLst/>
+          </a:prstGeom>
+          <a:noFill/>
+        </p:spPr>
+        <p:txBody>
+          <a:bodyPr wrap="square">
+            <a:spAutoFit/>
+          </a:bodyPr>
+          <a:lstStyle/>
+          <a:p>
+            <a:r>
+              <a:rPr sz="2600" b="1">
+                <a:solidFill>
+                  <a:srgbClr val="0B3D2E"/>
+                </a:solidFill>
+              </a:rPr>
+              <a:t>❓ Preguntas frecuentes</a:t>
+            </a:r>
+          </a:p>
+        </p:txBody>
+      </p:sp>
+      <p:sp>
+        <p:nvSpPr>
+          <p:cNvPr id="3" name="TextBox 2"/>
+          <p:cNvSpPr txBox="1"/>
+          <p:nvPr/>
+        </p:nvSpPr>
+        <p:spPr>
+          <a:xfrm>
+            <a:off x="457200" y="1280160"/>
+            <a:ext cx="8229600" cy="4937760"/>
+          </a:xfrm>
+          <a:prstGeom prst="rect">
+            <a:avLst/>
+          </a:prstGeom>
+          <a:noFill/>
+        </p:spPr>
+        <p:txBody>
+          <a:bodyPr wrap="square">
+            <a:spAutoFit/>
+          </a:bodyPr>
+          <a:lstStyle/>
+          <a:p>
+            <a:pPr>
+              <a:spcAft>
+                <a:spcPts val="600"/>
+              </a:spcAft>
+            </a:pPr>
+            <a:r>
+              <a:rPr sz="1500">
+                <a:solidFill>
+                  <a:srgbClr val="22282E"/>
+                </a:solidFill>
+              </a:rPr>
+              <a:t>•  ❓ ¿Debo intentar cubrir toda la matriz?</a:t>
+            </a:r>
+          </a:p>
+          <a:p>
+            <a:pPr>
+              <a:spcAft>
+                <a:spcPts val="600"/>
+              </a:spcAft>
+            </a:pPr>
+            <a:r>
+              <a:rPr sz="1500">
+                <a:solidFill>
+                  <a:srgbClr val="22282E"/>
+                </a:solidFill>
+              </a:rPr>
+              <a:t>•  No. Prioriza por amenazas reales de tu sector y por profundidad. Cien técnicas mal cubiertas valen menos que veinte detectadas con solidez.</a:t>
+            </a:r>
+          </a:p>
+          <a:p>
+            <a:pPr>
+              <a:spcAft>
+                <a:spcPts val="600"/>
+              </a:spcAft>
+            </a:pPr>
+            <a:r>
+              <a:rPr sz="1500">
+                <a:solidFill>
+                  <a:srgbClr val="22282E"/>
+                </a:solidFill>
+              </a:rPr>
+              <a:t>•  ❓ ¿ATT&amp;CK sustituye a la Cyber Kill Chain?</a:t>
+            </a:r>
+          </a:p>
+          <a:p>
+            <a:pPr>
+              <a:spcAft>
+                <a:spcPts val="600"/>
+              </a:spcAft>
+            </a:pPr>
+            <a:r>
+              <a:rPr sz="1500">
+                <a:solidFill>
+                  <a:srgbClr val="22282E"/>
+                </a:solidFill>
+              </a:rPr>
+              <a:t>•  No compiten. La Kill Chain describe fases de alto nivel; ATT&amp;CK detalla el "cómo" con técnicas concretas. Muchos equipos usan ambas.</a:t>
+            </a:r>
+          </a:p>
+          <a:p>
+            <a:pPr>
+              <a:spcAft>
+                <a:spcPts val="600"/>
+              </a:spcAft>
+            </a:pPr>
+            <a:r>
+              <a:rPr sz="1500">
+                <a:solidFill>
+                  <a:srgbClr val="22282E"/>
+                </a:solidFill>
+              </a:rPr>
+              <a:t>•  ❓ ¿Cobertura de Navigator = seguridad?</a:t>
+            </a:r>
+          </a:p>
+          <a:p>
+            <a:pPr>
+              <a:spcAft>
+                <a:spcPts val="600"/>
+              </a:spcAft>
+            </a:pPr>
+            <a:r>
+              <a:rPr sz="1500">
+                <a:solidFill>
+                  <a:srgbClr val="22282E"/>
+                </a:solidFill>
+              </a:rPr>
+              <a:t>•  Es un mapa, no una garantía. Una técnica en verde puede tener una regla frágil o llena de falsos positivos. Valídala (clase 200, purple team).</a:t>
+            </a:r>
+          </a:p>
+        </p:txBody>
+      </p:sp>
+    </p:spTree>
+  </p:cSld>
+  <p:clrMapOvr>
+    <a:masterClrMapping/>
+  </p:clrMapOvr>
+</p:sld>
+</file>
+
+<file path=ppt/slides/slide16.xml><?xml version="1.0" encoding="utf-8"?>
+<p:sld xmlns:a="http://schemas.openxmlformats.org/drawingml/2006/main" xmlns:p="http://schemas.openxmlformats.org/presentationml/2006/main" xmlns:r="http://schemas.openxmlformats.org/officeDocument/2006/relationships">
+  <p:cSld>
+    <p:spTree>
+      <p:nvGrpSpPr>
+        <p:cNvPr id="1" name=""/>
+        <p:cNvGrpSpPr/>
+        <p:nvPr/>
+      </p:nvGrpSpPr>
+      <p:grpSpPr/>
+      <p:sp>
+        <p:nvSpPr>
+          <p:cNvPr id="2" name="TextBox 1"/>
+          <p:cNvSpPr txBox="1"/>
+          <p:nvPr/>
+        </p:nvSpPr>
+        <p:spPr>
+          <a:xfrm>
+            <a:off x="457200" y="320040"/>
+            <a:ext cx="8229600" cy="822960"/>
+          </a:xfrm>
+          <a:prstGeom prst="rect">
+            <a:avLst/>
+          </a:prstGeom>
+          <a:noFill/>
+        </p:spPr>
+        <p:txBody>
+          <a:bodyPr wrap="square">
+            <a:spAutoFit/>
+          </a:bodyPr>
+          <a:lstStyle/>
+          <a:p>
+            <a:r>
+              <a:rPr sz="2600" b="1">
+                <a:solidFill>
+                  <a:srgbClr val="0B3D2E"/>
+                </a:solidFill>
+              </a:rPr>
+              <a:t>🔗 Referencias verificables y alcance</a:t>
+            </a:r>
+          </a:p>
+        </p:txBody>
+      </p:sp>
+      <p:sp>
+        <p:nvSpPr>
+          <p:cNvPr id="3" name="TextBox 2"/>
+          <p:cNvSpPr txBox="1"/>
+          <p:nvPr/>
+        </p:nvSpPr>
+        <p:spPr>
+          <a:xfrm>
+            <a:off x="457200" y="1280160"/>
+            <a:ext cx="8229600" cy="4937760"/>
+          </a:xfrm>
+          <a:prstGeom prst="rect">
+            <a:avLst/>
+          </a:prstGeom>
+          <a:noFill/>
+        </p:spPr>
+        <p:txBody>
+          <a:bodyPr wrap="square">
+            <a:spAutoFit/>
+          </a:bodyPr>
+          <a:lstStyle/>
+          <a:p>
+            <a:pPr>
+              <a:spcAft>
+                <a:spcPts val="600"/>
+              </a:spcAft>
+            </a:pPr>
+            <a:r>
+              <a:rPr sz="1500">
+                <a:solidFill>
+                  <a:srgbClr val="22282E"/>
+                </a:solidFill>
+              </a:rPr>
+              <a:t>•  MITRE ATT&amp;CK: base de conocimiento primaria para tácticas, técnicas, subtécnicas, grupos, software y procedimientos — &lt;https://attack.mitre.org/&gt;</a:t>
+            </a:r>
+          </a:p>
+          <a:p>
+            <a:pPr>
+              <a:spcAft>
+                <a:spcPts val="600"/>
+              </a:spcAft>
+            </a:pPr>
+            <a:r>
+              <a:rPr sz="1500">
+                <a:solidFill>
+                  <a:srgbClr val="22282E"/>
+                </a:solidFill>
+              </a:rPr>
+              <a:t>•  MITRE ATT&amp;CK Detection Strategies: contenido oficial que vincula estrategias, analíticas y componentes de datos; no certifica la cobertura de un entorno —…</a:t>
+            </a:r>
+          </a:p>
+          <a:p>
+            <a:pPr>
+              <a:spcAft>
+                <a:spcPts val="600"/>
+              </a:spcAft>
+            </a:pPr>
+            <a:r>
+              <a:rPr sz="1500">
+                <a:solidFill>
+                  <a:srgbClr val="22282E"/>
+                </a:solidFill>
+              </a:rPr>
+              <a:t>•  MITRE, detecciones y analíticas: guía oficial para interpretar el modelo de detección — &lt;https://attack.mitre.org/resources/get-started/detections-and-analytics/&gt;</a:t>
+            </a:r>
+          </a:p>
+          <a:p>
+            <a:pPr>
+              <a:spcAft>
+                <a:spcPts val="600"/>
+              </a:spcAft>
+            </a:pPr>
+            <a:r>
+              <a:rPr sz="1500">
+                <a:solidFill>
+                  <a:srgbClr val="22282E"/>
+                </a:solidFill>
+              </a:rPr>
+              <a:t>•  ATT&amp;CK Data Components: propiedades observables asociadas a comportamientos; deben traducirse a campos y fuentes concretas del despliegue — &lt;https://attack.mitre.org/datacomponents/&gt;</a:t>
+            </a:r>
+          </a:p>
+          <a:p>
+            <a:pPr>
+              <a:spcAft>
+                <a:spcPts val="600"/>
+              </a:spcAft>
+            </a:pPr>
+            <a:r>
+              <a:rPr sz="1500">
+                <a:solidFill>
+                  <a:srgbClr val="22282E"/>
+                </a:solidFill>
+              </a:rPr>
+              <a:t>•  ATT&amp;CK Navigator: herramienta oficial para crear capas y visualizar decisiones de cobertura; el color de una celda no es evidencia de eficacia — &lt;https://mitre-attack.github.io/attack-navigator/&gt;</a:t>
+            </a:r>
+          </a:p>
+          <a:p>
+            <a:pPr>
+              <a:spcAft>
+                <a:spcPts val="600"/>
+              </a:spcAft>
+            </a:pPr>
+            <a:r>
+              <a:rPr sz="1500">
+                <a:solidFill>
+                  <a:srgbClr val="22282E"/>
+                </a:solidFill>
+              </a:rPr>
+              <a:t>•  Bianco, D. "The Pyramid of Pain": fuente original del modelo conceptual; se usa como heurística de coste para el adversario, no como ley de priorización —…</a:t>
+            </a:r>
+          </a:p>
+          <a:p>
+            <a:pPr>
+              <a:spcAft>
+                <a:spcPts val="600"/>
+              </a:spcAft>
+            </a:pPr>
+            <a:r>
+              <a:rPr sz="1500">
+                <a:solidFill>
+                  <a:srgbClr val="22282E"/>
+                </a:solidFill>
+              </a:rPr>
+              <a:t>•  DeTT&amp;CT: herramienta comunitaria para administrar cobertura y visibilidad; complementa, pero no sustituye, pruebas locales — &lt;https://github.com/rabobank-cdc/DeTTECT&gt;</a:t>
+            </a:r>
+          </a:p>
+        </p:txBody>
+      </p:sp>
+    </p:spTree>
+  </p:cSld>
+  <p:clrMapOvr>
+    <a:masterClrMapping/>
+  </p:clrMapOvr>
+</p:sld>
+</file>
+
+<file path=ppt/slides/slide17.xml><?xml version="1.0" encoding="utf-8"?>
+<p:sld xmlns:a="http://schemas.openxmlformats.org/drawingml/2006/main" xmlns:p="http://schemas.openxmlformats.org/presentationml/2006/main" xmlns:r="http://schemas.openxmlformats.org/officeDocument/2006/relationships">
+  <p:cSld>
+    <p:spTree>
+      <p:nvGrpSpPr>
+        <p:cNvPr id="1" name=""/>
+        <p:cNvGrpSpPr/>
+        <p:nvPr/>
+      </p:nvGrpSpPr>
+      <p:grpSpPr/>
+      <p:sp>
+        <p:nvSpPr>
+          <p:cNvPr id="2" name="TextBox 1"/>
+          <p:cNvSpPr txBox="1"/>
+          <p:nvPr/>
+        </p:nvSpPr>
+        <p:spPr>
+          <a:xfrm>
+            <a:off x="457200" y="274320"/>
+            <a:ext cx="8229600" cy="640080"/>
+          </a:xfrm>
+          <a:prstGeom prst="rect">
+            <a:avLst/>
+          </a:prstGeom>
+          <a:noFill/>
+        </p:spPr>
+        <p:txBody>
+          <a:bodyPr wrap="square">
+            <a:spAutoFit/>
+          </a:bodyPr>
+          <a:lstStyle/>
+          <a:p>
+            <a:r>
+              <a:rPr sz="2200" b="1">
+                <a:solidFill>
+                  <a:srgbClr val="0B3D2E"/>
+                </a:solidFill>
+              </a:rPr>
+              <a:t>Diagrama de la clase</a:t>
+            </a:r>
+          </a:p>
+        </p:txBody>
+      </p:sp>
+      <p:pic>
+        <p:nvPicPr>
+          <p:cNvPr id="3" name="Picture 2" descr="4e29dc23a4bbcdc3.png"/>
+          <p:cNvPicPr>
+            <a:picLocks noChangeAspect="1"/>
+          </p:cNvPicPr>
+          <p:nvPr/>
+        </p:nvPicPr>
+        <p:blipFill>
+          <a:blip r:embed="rId2"/>
+          <a:stretch>
+            <a:fillRect/>
+          </a:stretch>
+        </p:blipFill>
+        <p:spPr>
+          <a:xfrm>
+            <a:off x="457200" y="3525012"/>
+            <a:ext cx="8229600" cy="448056"/>
+          </a:xfrm>
+          <a:prstGeom prst="rect">
+            <a:avLst/>
+          </a:prstGeom>
+        </p:spPr>
+      </p:pic>
     </p:spTree>
   </p:cSld>
   <p:clrMapOvr>
@@ -3698,7 +4389,7 @@
                   <a:srgbClr val="22282E"/>
                 </a:solidFill>
               </a:rPr>
-              <a:t>•  Usar MITRE ATT&amp;CK como columna vertebral de la detección: hablar de comportamiento adversario con un vocabulario común, mapear tus detecciones a técnicas, medir cobertura con ATT&amp;CK Navigator y priorizar qué detectar usando la pirámide del dolor. Dejarás de perseguir IOCs volátiles para detectar TTPs (tácticas, técnicas y procedimientos) que al atacante le duele cambiar.</a:t>
+              <a:t>•  Usar MITRE ATT&amp;CK como columna vertebral de la detección: hablar de comportamiento adversario con un vocabulario común, mapear tus detecciones a técnicas, medir cobertura con ATT&amp;CK Navigator y…</a:t>
             </a:r>
           </a:p>
         </p:txBody>
@@ -4092,7 +4783,7 @@
                   <a:srgbClr val="0B3D2E"/>
                 </a:solidFill>
               </a:rPr>
-              <a:t>📖 Definiciones y características</a:t>
+              <a:t>🧠 Explicación en profundidad</a:t>
             </a:r>
           </a:p>
         </p:txBody>
@@ -4130,82 +4821,97 @@
                   <a:srgbClr val="22282E"/>
                 </a:solidFill>
               </a:rPr>
-              <a:t>•  Táctica: el "por qué" del adversario (Ejecución, Persistencia, Exfiltración). Característica: 14 categorías que forman las columnas de la matriz.</a:t>
-            </a:r>
-          </a:p>
-          <a:p>
-            <a:pPr>
-              <a:spcAft>
-                <a:spcPts val="600"/>
-              </a:spcAft>
-            </a:pPr>
-            <a:r>
-              <a:rPr sz="1500">
-                <a:solidFill>
-                  <a:srgbClr val="22282E"/>
-                </a:solidFill>
-              </a:rPr>
-              <a:t>•  Técnica: el "cómo" (T1059 Command and Scripting Interpreter). Característica: puede tener subtécnicas (T1059.001 PowerShell).</a:t>
-            </a:r>
-          </a:p>
-          <a:p>
-            <a:pPr>
-              <a:spcAft>
-                <a:spcPts val="600"/>
-              </a:spcAft>
-            </a:pPr>
-            <a:r>
-              <a:rPr sz="1500">
-                <a:solidFill>
-                  <a:srgbClr val="22282E"/>
-                </a:solidFill>
-              </a:rPr>
-              <a:t>•  Procedimiento: la implementación concreta que usa un grupo. Característica: el nivel más específico y variable.</a:t>
-            </a:r>
-          </a:p>
-          <a:p>
-            <a:pPr>
-              <a:spcAft>
-                <a:spcPts val="600"/>
-              </a:spcAft>
-            </a:pPr>
-            <a:r>
-              <a:rPr sz="1500">
-                <a:solidFill>
-                  <a:srgbClr val="22282E"/>
-                </a:solidFill>
-              </a:rPr>
-              <a:t>•  Pirámide del dolor: modelo que ordena los indicadores por lo difícil que es para el atacante cambiarlos (hash &lt; IP &lt; dominio &lt; artefactos &lt; herramientas &lt; TTPs). Característica: detectar arriba de la pirámide causa más "dolor".</a:t>
-            </a:r>
-          </a:p>
-          <a:p>
-            <a:pPr>
-              <a:spcAft>
-                <a:spcPts val="600"/>
-              </a:spcAft>
-            </a:pPr>
-            <a:r>
-              <a:rPr sz="1500">
-                <a:solidFill>
-                  <a:srgbClr val="22282E"/>
-                </a:solidFill>
-              </a:rPr>
-              <a:t>•  Data source (ATT&amp;CK): tipo de telemetría necesaria para detectar una técnica (Process Creation, Network Traffic). Característica: guía tu estrategia de logging.</a:t>
-            </a:r>
-          </a:p>
-          <a:p>
-            <a:pPr>
-              <a:spcAft>
-                <a:spcPts val="600"/>
-              </a:spcAft>
-            </a:pPr>
-            <a:r>
-              <a:rPr sz="1500">
-                <a:solidFill>
-                  <a:srgbClr val="22282E"/>
-                </a:solidFill>
-              </a:rPr>
-              <a:t>•  ATT&amp;CK Navigator: herramienta web para colorear la matriz según cobertura o intel. Característica: comunica huecos visualmente.</a:t>
+              <a:t>•  ATT&amp;CK organiza conocimiento sobre comportamientos observados, no genera reglas automáticamente. Una táctica expresa el objetivo; una técnica, el método; un procedimiento, una implementación…</a:t>
+            </a:r>
+          </a:p>
+          <a:p>
+            <a:pPr>
+              <a:spcAft>
+                <a:spcPts val="600"/>
+              </a:spcAft>
+            </a:pPr>
+            <a:r>
+              <a:rPr sz="1500">
+                <a:solidFill>
+                  <a:srgbClr val="22282E"/>
+                </a:solidFill>
+              </a:rPr>
+              <a:t>•  El mapeo baja hasta campos concretos: proceso, autenticación, conexión o cambio de servicio. Una celda coloreada debe distinguir dato disponible, analítica diseñada, prueba superada y operación…</a:t>
+            </a:r>
+          </a:p>
+          <a:p>
+            <a:pPr>
+              <a:spcAft>
+                <a:spcPts val="600"/>
+              </a:spcAft>
+            </a:pPr>
+            <a:r>
+              <a:rPr sz="1500">
+                <a:solidFill>
+                  <a:srgbClr val="22282E"/>
+                </a:solidFill>
+              </a:rPr>
+              <a:t>•  T1021 Remote Services reúne formas distintas de acceso remoto. RDP puede dejar autenticación y creación de sesión; SMB puede mostrar acceso a recursos y creación de servicio; WinRM produce otro…</a:t>
+            </a:r>
+          </a:p>
+          <a:p>
+            <a:pPr>
+              <a:spcAft>
+                <a:spcPts val="600"/>
+              </a:spcAft>
+            </a:pPr>
+            <a:r>
+              <a:rPr sz="1500">
+                <a:solidFill>
+                  <a:srgbClr val="22282E"/>
+                </a:solidFill>
+              </a:rPr>
+              <a:t>•  La construcción empieza por escenarios relevantes. Si administradores usan RDP mediante un jump host, una relación directa desde una estación común tiene valor. Se necesitan origen, destino, cuenta…</a:t>
+            </a:r>
+          </a:p>
+          <a:p>
+            <a:pPr>
+              <a:spcAft>
+                <a:spcPts val="600"/>
+              </a:spcAft>
+            </a:pPr>
+            <a:r>
+              <a:rPr sz="1500">
+                <a:solidFill>
+                  <a:srgbClr val="22282E"/>
+                </a:solidFill>
+              </a:rPr>
+              <a:t>•  Una capa de Navigator necesita una leyenda. Verde puede significar fuente presente, regla desplegada o prueba superada, tres estados muy diferentes. Una evaluación útil distingue: sin dato; dato…</a:t>
+            </a:r>
+          </a:p>
+          <a:p>
+            <a:pPr>
+              <a:spcAft>
+                <a:spcPts val="600"/>
+              </a:spcAft>
+            </a:pPr>
+            <a:r>
+              <a:rPr sz="1500">
+                <a:solidFill>
+                  <a:srgbClr val="22282E"/>
+                </a:solidFill>
+              </a:rPr>
+              <a:t>•  Las brechas también se describen. Quizá la regla vea Windows administrado pero no Linux, o detecte servicio remoto pero no credenciales reutilizadas. Registrar variantes no observadas evita que la…</a:t>
+            </a:r>
+          </a:p>
+          <a:p>
+            <a:pPr>
+              <a:spcAft>
+                <a:spcPts val="600"/>
+              </a:spcAft>
+            </a:pPr>
+            <a:r>
+              <a:rPr sz="1500">
+                <a:solidFill>
+                  <a:srgbClr val="22282E"/>
+                </a:solidFill>
+              </a:rPr>
+              <a:t>•  Una prueba controlada ejecuta el procedimiento autorizado y observa cuatro capas: se generó el evento, llegó a plataforma, coincidió la analítica y el proceso respondió. Si falla la primera, no se…</a:t>
             </a:r>
           </a:p>
         </p:txBody>
@@ -4256,7 +4962,7 @@
                   <a:srgbClr val="0B3D2E"/>
                 </a:solidFill>
               </a:rPr>
-              <a:t>🧰 Herramientas y preparación</a:t>
+              <a:t>📔 Glosario</a:t>
             </a:r>
           </a:p>
         </p:txBody>
@@ -4294,67 +5000,97 @@
                   <a:srgbClr val="22282E"/>
                 </a:solidFill>
               </a:rPr>
-              <a:t>•  ATT&amp;CK Navigator (versión web oficial o desplegada localmente).</a:t>
-            </a:r>
-          </a:p>
-          <a:p>
-            <a:pPr>
-              <a:spcAft>
-                <a:spcPts val="600"/>
-              </a:spcAft>
-            </a:pPr>
-            <a:r>
-              <a:rPr sz="1500">
-                <a:solidFill>
-                  <a:srgbClr val="22282E"/>
-                </a:solidFill>
-              </a:rPr>
-              <a:t>•  El STIX/JSON de ATT&amp;CK para automatizar mapeos si lo deseas.</a:t>
-            </a:r>
-          </a:p>
-          <a:p>
-            <a:pPr>
-              <a:spcAft>
-                <a:spcPts val="600"/>
-              </a:spcAft>
-            </a:pPr>
-            <a:r>
-              <a:rPr sz="1500">
-                <a:solidFill>
-                  <a:srgbClr val="22282E"/>
-                </a:solidFill>
-              </a:rPr>
-              <a:t>•  Tus reglas Sigma de la clase 186 (ya traen tags attack.tXXXX).</a:t>
-            </a:r>
-          </a:p>
-          <a:p>
-            <a:pPr>
-              <a:spcAft>
-                <a:spcPts val="600"/>
-              </a:spcAft>
-            </a:pPr>
-            <a:r>
-              <a:rPr sz="1500">
-                <a:solidFill>
-                  <a:srgbClr val="22282E"/>
-                </a:solidFill>
-              </a:rPr>
-              <a:t>•  DeTT&amp;CT o Atomic Red Team para razonar sobre cobertura y validación (Atomic se usará en profundidad en la clase 200).</a:t>
-            </a:r>
-          </a:p>
-          <a:p>
-            <a:pPr>
-              <a:spcAft>
-                <a:spcPts val="600"/>
-              </a:spcAft>
-            </a:pPr>
-            <a:r>
-              <a:rPr sz="1500">
-                <a:solidFill>
-                  <a:srgbClr val="22282E"/>
-                </a:solidFill>
-              </a:rPr>
-              <a:t>•  Cualquier ejecución de técnicas para validar se hace en el laboratorio propio.</a:t>
+              <a:t>•  Táctica: objetivo intermedio del adversario.</a:t>
+            </a:r>
+          </a:p>
+          <a:p>
+            <a:pPr>
+              <a:spcAft>
+                <a:spcPts val="600"/>
+              </a:spcAft>
+            </a:pPr>
+            <a:r>
+              <a:rPr sz="1500">
+                <a:solidFill>
+                  <a:srgbClr val="22282E"/>
+                </a:solidFill>
+              </a:rPr>
+              <a:t>•  Técnica: método general para alcanzar un objetivo.</a:t>
+            </a:r>
+          </a:p>
+          <a:p>
+            <a:pPr>
+              <a:spcAft>
+                <a:spcPts val="600"/>
+              </a:spcAft>
+            </a:pPr>
+            <a:r>
+              <a:rPr sz="1500">
+                <a:solidFill>
+                  <a:srgbClr val="22282E"/>
+                </a:solidFill>
+              </a:rPr>
+              <a:t>•  Subtécnica: variante específica.</a:t>
+            </a:r>
+          </a:p>
+          <a:p>
+            <a:pPr>
+              <a:spcAft>
+                <a:spcPts val="600"/>
+              </a:spcAft>
+            </a:pPr>
+            <a:r>
+              <a:rPr sz="1500">
+                <a:solidFill>
+                  <a:srgbClr val="22282E"/>
+                </a:solidFill>
+              </a:rPr>
+              <a:t>•  Procedimiento: implementación observada.</a:t>
+            </a:r>
+          </a:p>
+          <a:p>
+            <a:pPr>
+              <a:spcAft>
+                <a:spcPts val="600"/>
+              </a:spcAft>
+            </a:pPr>
+            <a:r>
+              <a:rPr sz="1500">
+                <a:solidFill>
+                  <a:srgbClr val="22282E"/>
+                </a:solidFill>
+              </a:rPr>
+              <a:t>•  Componente de datos: actividad concreta observable.</a:t>
+            </a:r>
+          </a:p>
+          <a:p>
+            <a:pPr>
+              <a:spcAft>
+                <a:spcPts val="600"/>
+              </a:spcAft>
+            </a:pPr>
+            <a:r>
+              <a:rPr sz="1500">
+                <a:solidFill>
+                  <a:srgbClr val="22282E"/>
+                </a:solidFill>
+              </a:rPr>
+              <a:t>•  Estrategia de detección: enfoque para reconocer comportamiento.</a:t>
+            </a:r>
+          </a:p>
+          <a:p>
+            <a:pPr>
+              <a:spcAft>
+                <a:spcPts val="600"/>
+              </a:spcAft>
+            </a:pPr>
+            <a:r>
+              <a:rPr sz="1500">
+                <a:solidFill>
+                  <a:srgbClr val="22282E"/>
+                </a:solidFill>
+              </a:rPr>
+              <a:t>•  Cobertura validada: datos, analítica y prueba reproducible.</a:t>
             </a:r>
           </a:p>
         </p:txBody>
@@ -4405,7 +5141,7 @@
                   <a:srgbClr val="0B3D2E"/>
                 </a:solidFill>
               </a:rPr>
-              <a:t>🧪 Laboratorio guiado — Mapa de cobertura de detección</a:t>
+              <a:t>📖 Definiciones y características</a:t>
             </a:r>
           </a:p>
         </p:txBody>
@@ -4443,97 +5179,82 @@
                   <a:srgbClr val="22282E"/>
                 </a:solidFill>
               </a:rPr>
-              <a:t>•  Inventaria tus detecciones. Lista tus reglas Sigma/SIEM y anota el attack.tXXXX de cada una.</a:t>
-            </a:r>
-          </a:p>
-          <a:p>
-            <a:pPr>
-              <a:spcAft>
-                <a:spcPts val="600"/>
-              </a:spcAft>
-            </a:pPr>
-            <a:r>
-              <a:rPr sz="1500">
-                <a:solidFill>
-                  <a:srgbClr val="22282E"/>
-                </a:solidFill>
-              </a:rPr>
-              <a:t>•  Carga Navigator. Abre ATT&amp;CK Navigator y crea una capa nueva.</a:t>
-            </a:r>
-          </a:p>
-          <a:p>
-            <a:pPr>
-              <a:spcAft>
-                <a:spcPts val="600"/>
-              </a:spcAft>
-            </a:pPr>
-            <a:r>
-              <a:rPr sz="1500">
-                <a:solidFill>
-                  <a:srgbClr val="22282E"/>
-                </a:solidFill>
-              </a:rPr>
-              <a:t>•  Colorea cobertura. Marca en verde las técnicas que tus reglas cubren; en rojo las críticas sin cobertura.</a:t>
-            </a:r>
-          </a:p>
-          <a:p>
-            <a:pPr>
-              <a:spcAft>
-                <a:spcPts val="600"/>
-              </a:spcAft>
-            </a:pPr>
-            <a:r>
-              <a:rPr sz="1500">
-                <a:solidFill>
-                  <a:srgbClr val="22282E"/>
-                </a:solidFill>
-              </a:rPr>
-              <a:t>•  Cruza con tus fuentes. Para 5 técnicas rojas, revisa su data source en ATT&amp;CK y verifica si ya recolectas esa telemetría (clase 182).</a:t>
-            </a:r>
-          </a:p>
-          <a:p>
-            <a:pPr>
-              <a:spcAft>
-                <a:spcPts val="600"/>
-              </a:spcAft>
-            </a:pPr>
-            <a:r>
-              <a:rPr sz="1500">
-                <a:solidFill>
-                  <a:srgbClr val="22282E"/>
-                </a:solidFill>
-              </a:rPr>
-              <a:t>•  Aplica la pirámide del dolor. Clasifica 10 de tus detecciones: ¿detectas por hash/IP (base) o por comportamiento/TTP (cima)? Prioriza subir de nivel.</a:t>
-            </a:r>
-          </a:p>
-          <a:p>
-            <a:pPr>
-              <a:spcAft>
-                <a:spcPts val="600"/>
-              </a:spcAft>
-            </a:pPr>
-            <a:r>
-              <a:rPr sz="1500">
-                <a:solidFill>
-                  <a:srgbClr val="22282E"/>
-                </a:solidFill>
-              </a:rPr>
-              <a:t>•  Prioriza con intel. Elige un grupo relevante para tu sector (p. ej. de la página de Groups de ATT&amp;CK) y superpón sus técnicas: cubre primero las que ese grupo usa.</a:t>
-            </a:r>
-          </a:p>
-          <a:p>
-            <a:pPr>
-              <a:spcAft>
-                <a:spcPts val="600"/>
-              </a:spcAft>
-            </a:pPr>
-            <a:r>
-              <a:rPr sz="1500">
-                <a:solidFill>
-                  <a:srgbClr val="22282E"/>
-                </a:solidFill>
-              </a:rPr>
-              <a:t>•  Documenta huecos. Genera un plan: 5 técnicas sin cobertura, la telemetría que faltaría y la detección propuesta.</a:t>
+              <a:t>•  Táctica: el "por qué" del adversario (Ejecución, Persistencia, Exfiltración). Característica: 14 categorías que forman las columnas de la matriz.</a:t>
+            </a:r>
+          </a:p>
+          <a:p>
+            <a:pPr>
+              <a:spcAft>
+                <a:spcPts val="600"/>
+              </a:spcAft>
+            </a:pPr>
+            <a:r>
+              <a:rPr sz="1500">
+                <a:solidFill>
+                  <a:srgbClr val="22282E"/>
+                </a:solidFill>
+              </a:rPr>
+              <a:t>•  Técnica: el "cómo" (T1059 Command and Scripting Interpreter). Característica: puede tener subtécnicas (T1059.001 PowerShell).</a:t>
+            </a:r>
+          </a:p>
+          <a:p>
+            <a:pPr>
+              <a:spcAft>
+                <a:spcPts val="600"/>
+              </a:spcAft>
+            </a:pPr>
+            <a:r>
+              <a:rPr sz="1500">
+                <a:solidFill>
+                  <a:srgbClr val="22282E"/>
+                </a:solidFill>
+              </a:rPr>
+              <a:t>•  Procedimiento: la implementación concreta que usa un grupo. Característica: el nivel más específico y variable.</a:t>
+            </a:r>
+          </a:p>
+          <a:p>
+            <a:pPr>
+              <a:spcAft>
+                <a:spcPts val="600"/>
+              </a:spcAft>
+            </a:pPr>
+            <a:r>
+              <a:rPr sz="1500">
+                <a:solidFill>
+                  <a:srgbClr val="22282E"/>
+                </a:solidFill>
+              </a:rPr>
+              <a:t>•  Pirámide del dolor: modelo que ordena los indicadores por lo difícil que es para el atacante cambiarlos (hash &lt; IP &lt; dominio &lt; artefactos &lt; herramientas &lt; TTPs). Característica: detectar arriba de la…</a:t>
+            </a:r>
+          </a:p>
+          <a:p>
+            <a:pPr>
+              <a:spcAft>
+                <a:spcPts val="600"/>
+              </a:spcAft>
+            </a:pPr>
+            <a:r>
+              <a:rPr sz="1500">
+                <a:solidFill>
+                  <a:srgbClr val="22282E"/>
+                </a:solidFill>
+              </a:rPr>
+              <a:t>•  Data source (ATT&amp;CK): tipo de telemetría necesaria para detectar una técnica (Process Creation, Network Traffic). Característica: guía tu estrategia de logging.</a:t>
+            </a:r>
+          </a:p>
+          <a:p>
+            <a:pPr>
+              <a:spcAft>
+                <a:spcPts val="600"/>
+              </a:spcAft>
+            </a:pPr>
+            <a:r>
+              <a:rPr sz="1500">
+                <a:solidFill>
+                  <a:srgbClr val="22282E"/>
+                </a:solidFill>
+              </a:rPr>
+              <a:t>•  ATT&amp;CK Navigator: herramienta web para colorear la matriz según cobertura o intel. Característica: comunica huecos visualmente.</a:t>
             </a:r>
           </a:p>
         </p:txBody>
@@ -4584,7 +5305,7 @@
                   <a:srgbClr val="0B3D2E"/>
                 </a:solidFill>
               </a:rPr>
-              <a:t>✍️ Ejercicios</a:t>
+              <a:t>🔍 Cobertura resuelta — Remote Services</a:t>
             </a:r>
           </a:p>
         </p:txBody>
@@ -4622,82 +5343,97 @@
                   <a:srgbClr val="22282E"/>
                 </a:solidFill>
               </a:rPr>
-              <a:t>•  Clasifica 6 indicadores en su nivel de la pirámide del dolor.</a:t>
-            </a:r>
-          </a:p>
-          <a:p>
-            <a:pPr>
-              <a:spcAft>
-                <a:spcPts val="600"/>
-              </a:spcAft>
-            </a:pPr>
-            <a:r>
-              <a:rPr sz="1500">
-                <a:solidFill>
-                  <a:srgbClr val="22282E"/>
-                </a:solidFill>
-              </a:rPr>
-              <a:t>•  Elige una técnica (p. ej. T1053 Scheduled Task) y lista su data source y una detección.</a:t>
-            </a:r>
-          </a:p>
-          <a:p>
-            <a:pPr>
-              <a:spcAft>
-                <a:spcPts val="600"/>
-              </a:spcAft>
-            </a:pPr>
-            <a:r>
-              <a:rPr sz="1500">
-                <a:solidFill>
-                  <a:srgbClr val="22282E"/>
-                </a:solidFill>
-              </a:rPr>
-              <a:t>•  Crea una capa de Navigator con la cobertura real de tu laboratorio.</a:t>
-            </a:r>
-          </a:p>
-          <a:p>
-            <a:pPr>
-              <a:spcAft>
-                <a:spcPts val="600"/>
-              </a:spcAft>
-            </a:pPr>
-            <a:r>
-              <a:rPr sz="1500">
-                <a:solidFill>
-                  <a:srgbClr val="22282E"/>
-                </a:solidFill>
-              </a:rPr>
-              <a:t>•  Explica por qué detectar por hash es frágil con un ejemplo concreto.</a:t>
-            </a:r>
-          </a:p>
-          <a:p>
-            <a:pPr>
-              <a:spcAft>
-                <a:spcPts val="600"/>
-              </a:spcAft>
-            </a:pPr>
-            <a:r>
-              <a:rPr sz="1500">
-                <a:solidFill>
-                  <a:srgbClr val="22282E"/>
-                </a:solidFill>
-              </a:rPr>
-              <a:t>•  Mapea un ataque de la Parte 7 (red team) a una cadena de técnicas ATT&amp;CK.</a:t>
-            </a:r>
-          </a:p>
-          <a:p>
-            <a:pPr>
-              <a:spcAft>
-                <a:spcPts val="600"/>
-              </a:spcAft>
-            </a:pPr>
-            <a:r>
-              <a:rPr sz="1500">
-                <a:solidFill>
-                  <a:srgbClr val="22282E"/>
-                </a:solidFill>
-              </a:rPr>
-              <a:t>•  Propón cómo pasarías una detección de nivel IP a nivel TTP.</a:t>
+              <a:t>•  Se prioriza T1021 porque los administradores usan un bastión y los accesos directos a servidores críticos no están autorizados. En vez de colorear toda la técnica, se descompone:</a:t>
+            </a:r>
+          </a:p>
+          <a:p>
+            <a:pPr>
+              <a:spcAft>
+                <a:spcPts val="600"/>
+              </a:spcAft>
+            </a:pPr>
+            <a:r>
+              <a:rPr sz="1500">
+                <a:solidFill>
+                  <a:srgbClr val="22282E"/>
+                </a:solidFill>
+              </a:rPr>
+              <a:t>•  Procedimiento — Evidencia necesaria</a:t>
+            </a:r>
+          </a:p>
+          <a:p>
+            <a:pPr>
+              <a:spcAft>
+                <a:spcPts val="600"/>
+              </a:spcAft>
+            </a:pPr>
+            <a:r>
+              <a:rPr sz="1500">
+                <a:solidFill>
+                  <a:srgbClr val="22282E"/>
+                </a:solidFill>
+              </a:rPr>
+              <a:t>•  RDP directo — autenticación, origen, destino, sesión/proceso</a:t>
+            </a:r>
+          </a:p>
+          <a:p>
+            <a:pPr>
+              <a:spcAft>
+                <a:spcPts val="600"/>
+              </a:spcAft>
+            </a:pPr>
+            <a:r>
+              <a:rPr sz="1500">
+                <a:solidFill>
+                  <a:srgbClr val="22282E"/>
+                </a:solidFill>
+              </a:rPr>
+              <a:t>•  SMB/admin share — acceso a share, escritura, servicio/proceso</a:t>
+            </a:r>
+          </a:p>
+          <a:p>
+            <a:pPr>
+              <a:spcAft>
+                <a:spcPts val="600"/>
+              </a:spcAft>
+            </a:pPr>
+            <a:r>
+              <a:rPr sz="1500">
+                <a:solidFill>
+                  <a:srgbClr val="22282E"/>
+                </a:solidFill>
+              </a:rPr>
+              <a:t>•  WinRM — autenticación, servicio y proceso host</a:t>
+            </a:r>
+          </a:p>
+          <a:p>
+            <a:pPr>
+              <a:spcAft>
+                <a:spcPts val="600"/>
+              </a:spcAft>
+            </a:pPr>
+            <a:r>
+              <a:rPr sz="1500">
+                <a:solidFill>
+                  <a:srgbClr val="22282E"/>
+                </a:solidFill>
+              </a:rPr>
+              <a:t>•  SSH — autenticación y comando/sesión en Linux</a:t>
+            </a:r>
+          </a:p>
+          <a:p>
+            <a:pPr>
+              <a:spcAft>
+                <a:spcPts val="600"/>
+              </a:spcAft>
+            </a:pPr>
+            <a:r>
+              <a:rPr sz="1500">
+                <a:solidFill>
+                  <a:srgbClr val="22282E"/>
+                </a:solidFill>
+              </a:rPr>
+              <a:t>•  La capa Navigator puede mostrar estos resultados agregados, pero enlaza la ficha de evidencia. Probar RDP no autoriza marcar WinRM o SSH. El estado «dato presente» tampoco significa que un analista…</a:t>
             </a:r>
           </a:p>
         </p:txBody>
@@ -4748,7 +5484,7 @@
                   <a:srgbClr val="0B3D2E"/>
                 </a:solidFill>
               </a:rPr>
-              <a:t>📝 Reto verificable</a:t>
+              <a:t>✅ Criterio de dominio</a:t>
             </a:r>
           </a:p>
         </p:txBody>
@@ -4786,7 +5522,7 @@
                   <a:srgbClr val="22282E"/>
                 </a:solidFill>
               </a:rPr>
-              <a:t>•  Entrega una capa de ATT&amp;CK Navigator que refleje la cobertura de detección de tu laboratorio y un plan priorizado de 5 huecos a cerrar, cada uno con su data source y detección propuesta. Criterio de aceptación: la capa distingue claramente técnicas cubiertas y no cubiertas, y para cada hueco justificas la prioridad usando la pirámide del dolor y/o la relevancia de un grupo de amenaza concreto.</a:t>
+              <a:t>•  El alumno puede bajar de táctica a procedimiento, componentes y campos, ejecutar una prueba autorizada y describir brechas. El porcentaje de celdas coloreadas no es un resultado aceptable sin…</a:t>
             </a:r>
           </a:p>
         </p:txBody>
